--- a/00_PREZENTACE_Z_HODIN/Binarni_vyhledavaci_strom.pptx
+++ b/00_PREZENTACE_Z_HODIN/Binarni_vyhledavaci_strom.pptx
@@ -123,6 +123,11 @@
       </a:defRPr>
     </a:lvl9pPr>
   </p:defaultTextStyle>
+  <p:extLst>
+    <p:ext uri="{EFAFB233-063F-42B5-8137-9DF3F51BA10A}">
+      <p15:sldGuideLst xmlns:p15="http://schemas.microsoft.com/office/powerpoint/2012/main"/>
+    </p:ext>
+  </p:extLst>
 </p:presentation>
 </file>
 
@@ -5742,7 +5747,7 @@
           <a:p>
             <a:fld id="{A585CF86-D419-4CD3-96B9-CC0AA2A43628}" type="datetimeFigureOut">
               <a:rPr lang="en-US" smtClean="0"/>
-              <a:t>1/29/2025</a:t>
+              <a:t>2/10/2026</a:t>
             </a:fld>
             <a:endParaRPr lang="en-US"/>
           </a:p>
@@ -6348,7 +6353,7 @@
           <a:p>
             <a:fld id="{C8BF7F3B-614C-4631-96FD-F41BD44AE052}" type="datetimeFigureOut">
               <a:rPr lang="en-US" smtClean="0"/>
-              <a:t>1/28/2025</a:t>
+              <a:t>2/10/2026</a:t>
             </a:fld>
             <a:endParaRPr lang="en-US"/>
           </a:p>
@@ -6546,7 +6551,7 @@
           <a:p>
             <a:fld id="{C8BF7F3B-614C-4631-96FD-F41BD44AE052}" type="datetimeFigureOut">
               <a:rPr lang="en-US" smtClean="0"/>
-              <a:t>1/28/2025</a:t>
+              <a:t>2/10/2026</a:t>
             </a:fld>
             <a:endParaRPr lang="en-US"/>
           </a:p>
@@ -6754,7 +6759,7 @@
           <a:p>
             <a:fld id="{C8BF7F3B-614C-4631-96FD-F41BD44AE052}" type="datetimeFigureOut">
               <a:rPr lang="en-US" smtClean="0"/>
-              <a:t>1/28/2025</a:t>
+              <a:t>2/10/2026</a:t>
             </a:fld>
             <a:endParaRPr lang="en-US"/>
           </a:p>
@@ -6952,7 +6957,7 @@
           <a:p>
             <a:fld id="{C8BF7F3B-614C-4631-96FD-F41BD44AE052}" type="datetimeFigureOut">
               <a:rPr lang="en-US" smtClean="0"/>
-              <a:t>1/28/2025</a:t>
+              <a:t>2/10/2026</a:t>
             </a:fld>
             <a:endParaRPr lang="en-US"/>
           </a:p>
@@ -7227,7 +7232,7 @@
           <a:p>
             <a:fld id="{C8BF7F3B-614C-4631-96FD-F41BD44AE052}" type="datetimeFigureOut">
               <a:rPr lang="en-US" smtClean="0"/>
-              <a:t>1/28/2025</a:t>
+              <a:t>2/10/2026</a:t>
             </a:fld>
             <a:endParaRPr lang="en-US"/>
           </a:p>
@@ -7492,7 +7497,7 @@
           <a:p>
             <a:fld id="{C8BF7F3B-614C-4631-96FD-F41BD44AE052}" type="datetimeFigureOut">
               <a:rPr lang="en-US" smtClean="0"/>
-              <a:t>1/28/2025</a:t>
+              <a:t>2/10/2026</a:t>
             </a:fld>
             <a:endParaRPr lang="en-US"/>
           </a:p>
@@ -7904,7 +7909,7 @@
           <a:p>
             <a:fld id="{C8BF7F3B-614C-4631-96FD-F41BD44AE052}" type="datetimeFigureOut">
               <a:rPr lang="en-US" smtClean="0"/>
-              <a:t>1/28/2025</a:t>
+              <a:t>2/10/2026</a:t>
             </a:fld>
             <a:endParaRPr lang="en-US"/>
           </a:p>
@@ -8045,7 +8050,7 @@
           <a:p>
             <a:fld id="{C8BF7F3B-614C-4631-96FD-F41BD44AE052}" type="datetimeFigureOut">
               <a:rPr lang="en-US" smtClean="0"/>
-              <a:t>1/28/2025</a:t>
+              <a:t>2/10/2026</a:t>
             </a:fld>
             <a:endParaRPr lang="en-US"/>
           </a:p>
@@ -8158,7 +8163,7 @@
           <a:p>
             <a:fld id="{C8BF7F3B-614C-4631-96FD-F41BD44AE052}" type="datetimeFigureOut">
               <a:rPr lang="en-US" smtClean="0"/>
-              <a:t>1/28/2025</a:t>
+              <a:t>2/10/2026</a:t>
             </a:fld>
             <a:endParaRPr lang="en-US"/>
           </a:p>
@@ -8469,7 +8474,7 @@
           <a:p>
             <a:fld id="{C8BF7F3B-614C-4631-96FD-F41BD44AE052}" type="datetimeFigureOut">
               <a:rPr lang="en-US" smtClean="0"/>
-              <a:t>1/28/2025</a:t>
+              <a:t>2/10/2026</a:t>
             </a:fld>
             <a:endParaRPr lang="en-US"/>
           </a:p>
@@ -8757,7 +8762,7 @@
           <a:p>
             <a:fld id="{C8BF7F3B-614C-4631-96FD-F41BD44AE052}" type="datetimeFigureOut">
               <a:rPr lang="en-US" smtClean="0"/>
-              <a:t>1/28/2025</a:t>
+              <a:t>2/10/2026</a:t>
             </a:fld>
             <a:endParaRPr lang="en-US"/>
           </a:p>
@@ -9001,7 +9006,7 @@
           <a:p>
             <a:fld id="{C8BF7F3B-614C-4631-96FD-F41BD44AE052}" type="datetimeFigureOut">
               <a:rPr lang="en-US" smtClean="0"/>
-              <a:t>1/28/2025</a:t>
+              <a:t>2/10/2026</a:t>
             </a:fld>
             <a:endParaRPr lang="en-US"/>
           </a:p>
@@ -13945,8 +13950,8 @@
           </a:fontRef>
         </p:style>
       </p:cxnSp>
-      <mc:AlternateContent xmlns:mc="http://schemas.openxmlformats.org/markup-compatibility/2006">
-        <mc:Choice xmlns:a14="http://schemas.microsoft.com/office/drawing/2010/main" Requires="a14">
+      <mc:AlternateContent xmlns:mc="http://schemas.openxmlformats.org/markup-compatibility/2006" xmlns:a14="http://schemas.microsoft.com/office/drawing/2010/main">
+        <mc:Choice Requires="a14">
           <p:sp>
             <p:nvSpPr>
               <p:cNvPr id="22" name="TextBox 21">
@@ -14023,7 +14028,7 @@
             </p:txBody>
           </p:sp>
         </mc:Choice>
-        <mc:Fallback>
+        <mc:Fallback xmlns="">
           <p:sp>
             <p:nvSpPr>
               <p:cNvPr id="22" name="TextBox 21">
@@ -15630,8 +15635,8 @@
           </a:fontRef>
         </p:style>
       </p:cxnSp>
-      <mc:AlternateContent xmlns:mc="http://schemas.openxmlformats.org/markup-compatibility/2006">
-        <mc:Choice xmlns:a14="http://schemas.microsoft.com/office/drawing/2010/main" Requires="a14">
+      <mc:AlternateContent xmlns:mc="http://schemas.openxmlformats.org/markup-compatibility/2006" xmlns:a14="http://schemas.microsoft.com/office/drawing/2010/main">
+        <mc:Choice Requires="a14">
           <p:sp>
             <p:nvSpPr>
               <p:cNvPr id="22" name="TextBox 21">
@@ -15708,7 +15713,7 @@
             </p:txBody>
           </p:sp>
         </mc:Choice>
-        <mc:Fallback>
+        <mc:Fallback xmlns="">
           <p:sp>
             <p:nvSpPr>
               <p:cNvPr id="22" name="TextBox 21">
@@ -17536,8 +17541,8 @@
           </a:fontRef>
         </p:style>
       </p:cxnSp>
-      <mc:AlternateContent xmlns:mc="http://schemas.openxmlformats.org/markup-compatibility/2006">
-        <mc:Choice xmlns:a14="http://schemas.microsoft.com/office/drawing/2010/main" Requires="a14">
+      <mc:AlternateContent xmlns:mc="http://schemas.openxmlformats.org/markup-compatibility/2006" xmlns:a14="http://schemas.microsoft.com/office/drawing/2010/main">
+        <mc:Choice Requires="a14">
           <p:sp>
             <p:nvSpPr>
               <p:cNvPr id="22" name="TextBox 21">
@@ -17614,7 +17619,7 @@
             </p:txBody>
           </p:sp>
         </mc:Choice>
-        <mc:Fallback>
+        <mc:Fallback xmlns="">
           <p:sp>
             <p:nvSpPr>
               <p:cNvPr id="22" name="TextBox 21">
@@ -20147,8 +20152,8 @@
           </a:graphicData>
         </a:graphic>
       </p:graphicFrame>
-      <mc:AlternateContent xmlns:mc="http://schemas.openxmlformats.org/markup-compatibility/2006">
-        <mc:Choice xmlns:a14="http://schemas.microsoft.com/office/drawing/2010/main" Requires="a14">
+      <mc:AlternateContent xmlns:mc="http://schemas.openxmlformats.org/markup-compatibility/2006" xmlns:a14="http://schemas.microsoft.com/office/drawing/2010/main">
+        <mc:Choice Requires="a14">
           <p:sp>
             <p:nvSpPr>
               <p:cNvPr id="9" name="TextBox 8">
@@ -20177,6 +20182,7 @@
               </a:bodyPr>
               <a:lstStyle/>
               <a:p>
+                <a:pPr/>
                 <a14:m>
                   <m:oMathPara xmlns:m="http://schemas.openxmlformats.org/officeDocument/2006/math">
                     <m:oMathParaPr>
@@ -20231,7 +20237,7 @@
             </p:txBody>
           </p:sp>
         </mc:Choice>
-        <mc:Fallback>
+        <mc:Fallback xmlns="">
           <p:sp>
             <p:nvSpPr>
               <p:cNvPr id="9" name="TextBox 8">
@@ -20343,7 +20349,7 @@
         <p:spPr>
           <a:xfrm>
             <a:off x="8221827" y="3429000"/>
-            <a:ext cx="474921" cy="2312581"/>
+            <a:ext cx="474921" cy="2312582"/>
           </a:xfrm>
           <a:prstGeom prst="rightBrace">
             <a:avLst>
@@ -20396,7 +20402,7 @@
             </p:nvSpPr>
             <p:spPr>
               <a:xfrm>
-                <a:off x="8886479" y="4354457"/>
+                <a:off x="8886479" y="4354458"/>
                 <a:ext cx="1919646" cy="461665"/>
               </a:xfrm>
               <a:prstGeom prst="rect">
@@ -20410,6 +20416,7 @@
               </a:bodyPr>
               <a:lstStyle/>
               <a:p>
+                <a:pPr/>
                 <a14:m>
                   <m:oMathPara xmlns:m="http://schemas.openxmlformats.org/officeDocument/2006/math">
                     <m:oMathParaPr>
@@ -20499,7 +20506,7 @@
             </p:nvSpPr>
             <p:spPr>
               <a:xfrm>
-                <a:off x="8886479" y="4354457"/>
+                <a:off x="8886479" y="4354458"/>
                 <a:ext cx="1919646" cy="461665"/>
               </a:xfrm>
               <a:prstGeom prst="rect">
@@ -20517,7 +20524,7 @@
               <a:lstStyle/>
               <a:p>
                 <a:r>
-                  <a:rPr lang="en-US">
+                  <a:rPr lang="cs-CZ">
                     <a:noFill/>
                   </a:rPr>
                   <a:t> </a:t>
@@ -21396,7 +21403,7 @@
                       <a:srgbClr val="C8D3DA"/>
                     </a:solidFill>
                   </a:rPr>
-                  <a:t>Ovšem kvůli vyvažování by </a:t>
+                  <a:t>Ovšem kvůli udržování rovnováhy při opakovaném </a:t>
                 </a:r>
                 <a:r>
                   <a:rPr lang="cs-CZ" sz="2400" i="1" dirty="0">
@@ -21477,7 +21484,7 @@
               <a:lstStyle/>
               <a:p>
                 <a:r>
-                  <a:rPr lang="en-US">
+                  <a:rPr lang="cs-CZ">
                     <a:noFill/>
                   </a:rPr>
                   <a:t> </a:t>
@@ -21602,6 +21609,36 @@
           </a:p>
         </p:txBody>
       </p:sp>
+      <p:pic>
+        <p:nvPicPr>
+          <p:cNvPr id="7" name="Obrázek 6" descr="Obsah obrázku diagram, řada/pruh, kruh, bílé&#10;&#10;Obsah generovaný pomocí AI může být nesprávný.">
+            <a:extLst>
+              <a:ext uri="{FF2B5EF4-FFF2-40B4-BE49-F238E27FC236}">
+                <a16:creationId xmlns:a16="http://schemas.microsoft.com/office/drawing/2014/main" id="{1C87213B-573B-8C53-279B-0DA7BAB7F9FE}"/>
+              </a:ext>
+            </a:extLst>
+          </p:cNvPr>
+          <p:cNvPicPr>
+            <a:picLocks noChangeAspect="1"/>
+          </p:cNvPicPr>
+          <p:nvPr/>
+        </p:nvPicPr>
+        <p:blipFill>
+          <a:blip r:embed="rId3"/>
+          <a:stretch>
+            <a:fillRect/>
+          </a:stretch>
+        </p:blipFill>
+        <p:spPr>
+          <a:xfrm>
+            <a:off x="8410353" y="0"/>
+            <a:ext cx="3466484" cy="1748366"/>
+          </a:xfrm>
+          <a:prstGeom prst="rect">
+            <a:avLst/>
+          </a:prstGeom>
+        </p:spPr>
+      </p:pic>
     </p:spTree>
     <p:extLst>
       <p:ext uri="{BB962C8B-B14F-4D97-AF65-F5344CB8AC3E}">
@@ -22079,9 +22116,9 @@
                   <a:t> </a:t>
                 </a:r>
                 <a:r>
-                  <a:rPr lang="en-US" b="1" i="0" u="none" strike="noStrike" baseline="0" dirty="0" err="1">
+                  <a:rPr lang="en-US" i="0" u="none" strike="noStrike" baseline="0" dirty="0" err="1">
                     <a:solidFill>
-                      <a:srgbClr val="F16D28"/>
+                      <a:schemeClr val="bg1"/>
                     </a:solidFill>
                   </a:rPr>
                   <a:t>M</a:t>
@@ -22100,7 +22137,23 @@
                       <a:srgbClr val="C8D3DA"/>
                     </a:solidFill>
                   </a:rPr>
-                  <a:t> Landis</a:t>
+                  <a:t> </a:t>
+                </a:r>
+                <a:r>
+                  <a:rPr lang="en-US" b="1" i="0" u="none" strike="noStrike" baseline="0" dirty="0">
+                    <a:solidFill>
+                      <a:srgbClr val="F16D28"/>
+                    </a:solidFill>
+                  </a:rPr>
+                  <a:t>L</a:t>
+                </a:r>
+                <a:r>
+                  <a:rPr lang="en-US" b="0" i="0" u="none" strike="noStrike" baseline="0" dirty="0">
+                    <a:solidFill>
+                      <a:srgbClr val="C8D3DA"/>
+                    </a:solidFill>
+                  </a:rPr>
+                  <a:t>andis</a:t>
                 </a:r>
                 <a:endParaRPr lang="cs-CZ" b="0" i="0" u="none" strike="noStrike" baseline="0" dirty="0">
                   <a:solidFill>
@@ -22506,7 +22559,7 @@
               <a:lstStyle/>
               <a:p>
                 <a:r>
-                  <a:rPr lang="en-US">
+                  <a:rPr lang="cs-CZ">
                     <a:noFill/>
                   </a:rPr>
                   <a:t> </a:t>
@@ -22948,8 +23001,8 @@
           </a:p>
         </p:txBody>
       </p:sp>
-      <mc:AlternateContent xmlns:mc="http://schemas.openxmlformats.org/markup-compatibility/2006">
-        <mc:Choice xmlns:a14="http://schemas.microsoft.com/office/drawing/2010/main" Requires="a14">
+      <mc:AlternateContent xmlns:mc="http://schemas.openxmlformats.org/markup-compatibility/2006" xmlns:a14="http://schemas.microsoft.com/office/drawing/2010/main">
+        <mc:Choice Requires="a14">
           <p:sp>
             <p:nvSpPr>
               <p:cNvPr id="3" name="Content Placeholder 2">
@@ -23199,7 +23252,7 @@
             </p:txBody>
           </p:sp>
         </mc:Choice>
-        <mc:Fallback>
+        <mc:Fallback xmlns="">
           <p:sp>
             <p:nvSpPr>
               <p:cNvPr id="3" name="Content Placeholder 2">
@@ -23507,8 +23560,8 @@
           </a:p>
         </p:txBody>
       </p:sp>
-      <mc:AlternateContent xmlns:mc="http://schemas.openxmlformats.org/markup-compatibility/2006">
-        <mc:Choice xmlns:a14="http://schemas.microsoft.com/office/drawing/2010/main" Requires="a14">
+      <mc:AlternateContent xmlns:mc="http://schemas.openxmlformats.org/markup-compatibility/2006" xmlns:a14="http://schemas.microsoft.com/office/drawing/2010/main">
+        <mc:Choice Requires="a14">
           <p:sp>
             <p:nvSpPr>
               <p:cNvPr id="3" name="Content Placeholder 2">
@@ -23527,13 +23580,13 @@
             </p:nvSpPr>
             <p:spPr>
               <a:xfrm>
-                <a:off x="838200" y="2038280"/>
-                <a:ext cx="7753800" cy="4351338"/>
+                <a:off x="838200" y="1913861"/>
+                <a:ext cx="7753800" cy="4752754"/>
               </a:xfrm>
             </p:spPr>
             <p:txBody>
               <a:bodyPr>
-                <a:normAutofit lnSpcReduction="10000"/>
+                <a:normAutofit fontScale="92500" lnSpcReduction="10000"/>
               </a:bodyPr>
               <a:lstStyle/>
               <a:p>
@@ -24382,8 +24435,23 @@
                 </a:endParaRPr>
               </a:p>
               <a:p>
-                <a:pPr lvl="2"/>
-                <a:endParaRPr lang="en-US" dirty="0">
+                <a:r>
+                  <a:rPr lang="cs-CZ" sz="2200" b="1" dirty="0">
+                    <a:solidFill>
+                      <a:srgbClr val="C8D3DA"/>
+                    </a:solidFill>
+                  </a:rPr>
+                  <a:t>Úplný </a:t>
+                </a:r>
+                <a:r>
+                  <a:rPr lang="cs-CZ" sz="2200" dirty="0">
+                    <a:solidFill>
+                      <a:srgbClr val="C8D3DA"/>
+                    </a:solidFill>
+                  </a:rPr>
+                  <a:t>– všechny úrovně stromu zcela zaplněny uzly (každý má 2 potomky), s možnou výjimkou poslední úrovně</a:t>
+                </a:r>
+                <a:endParaRPr lang="en-US" sz="2200" b="1" dirty="0">
                   <a:solidFill>
                     <a:srgbClr val="C8D3DA"/>
                   </a:solidFill>
@@ -24400,7 +24468,7 @@
             </p:txBody>
           </p:sp>
         </mc:Choice>
-        <mc:Fallback>
+        <mc:Fallback xmlns="">
           <p:sp>
             <p:nvSpPr>
               <p:cNvPr id="3" name="Content Placeholder 2">
@@ -24419,13 +24487,13 @@
             </p:nvSpPr>
             <p:spPr>
               <a:xfrm>
-                <a:off x="838200" y="2038280"/>
-                <a:ext cx="7753800" cy="4351338"/>
+                <a:off x="838200" y="1913861"/>
+                <a:ext cx="7753800" cy="4752754"/>
               </a:xfrm>
               <a:blipFill>
                 <a:blip r:embed="rId2"/>
                 <a:stretch>
-                  <a:fillRect l="-1416" t="-3081" r="-2360"/>
+                  <a:fillRect l="-1259" t="-2564"/>
                 </a:stretch>
               </a:blipFill>
             </p:spPr>
@@ -24434,7 +24502,7 @@
               <a:lstStyle/>
               <a:p>
                 <a:r>
-                  <a:rPr lang="en-US">
+                  <a:rPr lang="cs-CZ">
                     <a:noFill/>
                   </a:rPr>
                   <a:t> </a:t>
@@ -25267,8 +25335,8 @@
           </a:p>
         </p:txBody>
       </p:sp>
-      <mc:AlternateContent xmlns:mc="http://schemas.openxmlformats.org/markup-compatibility/2006">
-        <mc:Choice xmlns:a14="http://schemas.microsoft.com/office/drawing/2010/main" Requires="a14">
+      <mc:AlternateContent xmlns:mc="http://schemas.openxmlformats.org/markup-compatibility/2006" xmlns:a14="http://schemas.microsoft.com/office/drawing/2010/main">
+        <mc:Choice Requires="a14">
           <p:sp>
             <p:nvSpPr>
               <p:cNvPr id="65" name="TextBox 64">
@@ -25377,7 +25445,7 @@
             </p:txBody>
           </p:sp>
         </mc:Choice>
-        <mc:Fallback>
+        <mc:Fallback xmlns="">
           <p:sp>
             <p:nvSpPr>
               <p:cNvPr id="65" name="TextBox 64">
@@ -25843,6 +25911,49 @@
                                   </p:childTnLst>
                                 </p:cTn>
                               </p:par>
+                              <p:par>
+                                <p:cTn id="36" presetID="10" presetClass="entr" presetSubtype="0" fill="hold" nodeType="withEffect">
+                                  <p:stCondLst>
+                                    <p:cond delay="0"/>
+                                  </p:stCondLst>
+                                  <p:childTnLst>
+                                    <p:set>
+                                      <p:cBhvr>
+                                        <p:cTn id="37" dur="1" fill="hold">
+                                          <p:stCondLst>
+                                            <p:cond delay="0"/>
+                                          </p:stCondLst>
+                                        </p:cTn>
+                                        <p:tgtEl>
+                                          <p:spTgt spid="3">
+                                            <p:txEl>
+                                              <p:pRg st="7" end="7"/>
+                                            </p:txEl>
+                                          </p:spTgt>
+                                        </p:tgtEl>
+                                        <p:attrNameLst>
+                                          <p:attrName>style.visibility</p:attrName>
+                                        </p:attrNameLst>
+                                      </p:cBhvr>
+                                      <p:to>
+                                        <p:strVal val="visible"/>
+                                      </p:to>
+                                    </p:set>
+                                    <p:animEffect transition="in" filter="fade">
+                                      <p:cBhvr>
+                                        <p:cTn id="38" dur="500"/>
+                                        <p:tgtEl>
+                                          <p:spTgt spid="3">
+                                            <p:txEl>
+                                              <p:pRg st="7" end="7"/>
+                                            </p:txEl>
+                                          </p:spTgt>
+                                        </p:tgtEl>
+                                      </p:cBhvr>
+                                    </p:animEffect>
+                                  </p:childTnLst>
+                                </p:cTn>
+                              </p:par>
                             </p:childTnLst>
                           </p:cTn>
                         </p:par>
@@ -25850,26 +25961,26 @@
                     </p:cTn>
                   </p:par>
                   <p:par>
-                    <p:cTn id="36" fill="hold">
+                    <p:cTn id="39" fill="hold">
                       <p:stCondLst>
                         <p:cond delay="indefinite"/>
                       </p:stCondLst>
                       <p:childTnLst>
                         <p:par>
-                          <p:cTn id="37" fill="hold">
+                          <p:cTn id="40" fill="hold">
                             <p:stCondLst>
                               <p:cond delay="0"/>
                             </p:stCondLst>
                             <p:childTnLst>
                               <p:par>
-                                <p:cTn id="38" presetID="10" presetClass="entr" presetSubtype="0" fill="hold" grpId="0" nodeType="clickEffect">
+                                <p:cTn id="41" presetID="10" presetClass="entr" presetSubtype="0" fill="hold" grpId="0" nodeType="clickEffect">
                                   <p:stCondLst>
                                     <p:cond delay="0"/>
                                   </p:stCondLst>
                                   <p:childTnLst>
                                     <p:set>
                                       <p:cBhvr>
-                                        <p:cTn id="39" dur="1" fill="hold">
+                                        <p:cTn id="42" dur="1" fill="hold">
                                           <p:stCondLst>
                                             <p:cond delay="0"/>
                                           </p:stCondLst>
@@ -25887,7 +25998,7 @@
                                     </p:set>
                                     <p:animEffect transition="in" filter="fade">
                                       <p:cBhvr>
-                                        <p:cTn id="40" dur="500"/>
+                                        <p:cTn id="43" dur="500"/>
                                         <p:tgtEl>
                                           <p:spTgt spid="65"/>
                                         </p:tgtEl>
@@ -30929,8 +31040,8 @@
           </a:fontRef>
         </p:style>
       </p:cxnSp>
-      <mc:AlternateContent xmlns:mc="http://schemas.openxmlformats.org/markup-compatibility/2006">
-        <mc:Choice xmlns:a14="http://schemas.microsoft.com/office/drawing/2010/main" Requires="a14">
+      <mc:AlternateContent xmlns:mc="http://schemas.openxmlformats.org/markup-compatibility/2006" xmlns:a14="http://schemas.microsoft.com/office/drawing/2010/main">
+        <mc:Choice Requires="a14">
           <p:sp>
             <p:nvSpPr>
               <p:cNvPr id="25" name="TextBox 24">
@@ -30959,6 +31070,7 @@
               </a:bodyPr>
               <a:lstStyle/>
               <a:p>
+                <a:pPr/>
                 <a14:m>
                   <m:oMathPara xmlns:m="http://schemas.openxmlformats.org/officeDocument/2006/math">
                     <m:oMathParaPr>
@@ -30995,7 +31107,7 @@
             </p:txBody>
           </p:sp>
         </mc:Choice>
-        <mc:Fallback>
+        <mc:Fallback xmlns="">
           <p:sp>
             <p:nvSpPr>
               <p:cNvPr id="25" name="TextBox 24">
@@ -33838,7 +33950,7 @@
         </p:blipFill>
         <p:spPr>
           <a:xfrm>
-            <a:off x="5020858" y="2055813"/>
+            <a:off x="4914532" y="2055813"/>
             <a:ext cx="6799893" cy="1928541"/>
           </a:xfrm>
           <a:prstGeom prst="rect">
@@ -33846,8 +33958,8 @@
           </a:prstGeom>
         </p:spPr>
       </p:pic>
-      <mc:AlternateContent xmlns:mc="http://schemas.openxmlformats.org/markup-compatibility/2006">
-        <mc:Choice xmlns:a14="http://schemas.microsoft.com/office/drawing/2010/main" Requires="a14">
+      <mc:AlternateContent xmlns:mc="http://schemas.openxmlformats.org/markup-compatibility/2006" xmlns:a14="http://schemas.microsoft.com/office/drawing/2010/main">
+        <mc:Choice Requires="a14">
           <p:sp>
             <p:nvSpPr>
               <p:cNvPr id="40" name="TextBox 39">
@@ -33924,7 +34036,7 @@
             </p:txBody>
           </p:sp>
         </mc:Choice>
-        <mc:Fallback>
+        <mc:Fallback xmlns="">
           <p:sp>
             <p:nvSpPr>
               <p:cNvPr id="40" name="TextBox 39">
@@ -34072,8 +34184,8 @@
           </a:fontRef>
         </p:style>
       </p:cxnSp>
-      <mc:AlternateContent xmlns:mc="http://schemas.openxmlformats.org/markup-compatibility/2006">
-        <mc:Choice xmlns:a14="http://schemas.microsoft.com/office/drawing/2010/main" Requires="a14">
+      <mc:AlternateContent xmlns:mc="http://schemas.openxmlformats.org/markup-compatibility/2006" xmlns:a14="http://schemas.microsoft.com/office/drawing/2010/main">
+        <mc:Choice Requires="a14">
           <p:sp>
             <p:nvSpPr>
               <p:cNvPr id="48" name="TextBox 47">
@@ -34150,7 +34262,7 @@
             </p:txBody>
           </p:sp>
         </mc:Choice>
-        <mc:Fallback>
+        <mc:Fallback xmlns="">
           <p:sp>
             <p:nvSpPr>
               <p:cNvPr id="48" name="TextBox 47">
@@ -36030,8 +36142,8 @@
           </a:fontRef>
         </p:style>
       </p:cxnSp>
-      <mc:AlternateContent xmlns:mc="http://schemas.openxmlformats.org/markup-compatibility/2006">
-        <mc:Choice xmlns:a14="http://schemas.microsoft.com/office/drawing/2010/main" Requires="a14">
+      <mc:AlternateContent xmlns:mc="http://schemas.openxmlformats.org/markup-compatibility/2006" xmlns:a14="http://schemas.microsoft.com/office/drawing/2010/main">
+        <mc:Choice Requires="a14">
           <p:sp>
             <p:nvSpPr>
               <p:cNvPr id="25" name="TextBox 24">
@@ -36108,7 +36220,7 @@
             </p:txBody>
           </p:sp>
         </mc:Choice>
-        <mc:Fallback>
+        <mc:Fallback xmlns="">
           <p:sp>
             <p:nvSpPr>
               <p:cNvPr id="25" name="TextBox 24">
@@ -36462,8 +36574,8 @@
           </a:fontRef>
         </p:style>
       </p:cxnSp>
-      <mc:AlternateContent xmlns:mc="http://schemas.openxmlformats.org/markup-compatibility/2006">
-        <mc:Choice xmlns:a14="http://schemas.microsoft.com/office/drawing/2010/main" Requires="a14">
+      <mc:AlternateContent xmlns:mc="http://schemas.openxmlformats.org/markup-compatibility/2006" xmlns:a14="http://schemas.microsoft.com/office/drawing/2010/main">
+        <mc:Choice Requires="a14">
           <p:sp>
             <p:nvSpPr>
               <p:cNvPr id="43" name="TextBox 42">
@@ -36540,7 +36652,7 @@
             </p:txBody>
           </p:sp>
         </mc:Choice>
-        <mc:Fallback>
+        <mc:Fallback xmlns="">
           <p:sp>
             <p:nvSpPr>
               <p:cNvPr id="43" name="TextBox 42">
@@ -36585,8 +36697,8 @@
           </p:sp>
         </mc:Fallback>
       </mc:AlternateContent>
-      <mc:AlternateContent xmlns:mc="http://schemas.openxmlformats.org/markup-compatibility/2006">
-        <mc:Choice xmlns:a14="http://schemas.microsoft.com/office/drawing/2010/main" Requires="a14">
+      <mc:AlternateContent xmlns:mc="http://schemas.openxmlformats.org/markup-compatibility/2006" xmlns:a14="http://schemas.microsoft.com/office/drawing/2010/main">
+        <mc:Choice Requires="a14">
           <p:sp>
             <p:nvSpPr>
               <p:cNvPr id="44" name="TextBox 43">
@@ -36671,7 +36783,7 @@
             </p:txBody>
           </p:sp>
         </mc:Choice>
-        <mc:Fallback>
+        <mc:Fallback xmlns="">
           <p:sp>
             <p:nvSpPr>
               <p:cNvPr id="44" name="TextBox 43">
